--- a/Template Poster PRIMA ITB 2025.pptx
+++ b/Template Poster PRIMA ITB 2025.pptx
@@ -3130,7 +3130,7 @@
         <p:spPr>
           <a:xfrm>
             <a:off x="144780" y="1670304"/>
-            <a:ext cx="2382012" cy="954107"/>
+            <a:ext cx="2382012" cy="1815882"/>
           </a:xfrm>
           <a:prstGeom prst="rect">
             <a:avLst/>
@@ -3145,449 +3145,9 @@
           <a:p>
             <a:pPr algn="just"/>
             <a:r>
-              <a:rPr lang="en-ID" sz="800" dirty="0">
-                <a:latin typeface="Arial" panose="020B0604020202020204" pitchFamily="34" charset="0"/>
-                <a:cs typeface="Arial" panose="020B0604020202020204" pitchFamily="34" charset="0"/>
-              </a:rPr>
-              <a:t>Lorem ipsum </a:t>
-            </a:r>
-            <a:r>
-              <a:rPr lang="en-ID" sz="800" dirty="0" err="1">
-                <a:latin typeface="Arial" panose="020B0604020202020204" pitchFamily="34" charset="0"/>
-                <a:cs typeface="Arial" panose="020B0604020202020204" pitchFamily="34" charset="0"/>
-              </a:rPr>
-              <a:t>dolor</a:t>
-            </a:r>
-            <a:r>
-              <a:rPr lang="en-ID" sz="800" dirty="0">
-                <a:latin typeface="Arial" panose="020B0604020202020204" pitchFamily="34" charset="0"/>
-                <a:cs typeface="Arial" panose="020B0604020202020204" pitchFamily="34" charset="0"/>
-              </a:rPr>
-              <a:t> sit </a:t>
-            </a:r>
-            <a:r>
-              <a:rPr lang="en-ID" sz="800" dirty="0" err="1">
-                <a:latin typeface="Arial" panose="020B0604020202020204" pitchFamily="34" charset="0"/>
-                <a:cs typeface="Arial" panose="020B0604020202020204" pitchFamily="34" charset="0"/>
-              </a:rPr>
-              <a:t>amet</a:t>
-            </a:r>
-            <a:r>
-              <a:rPr lang="en-ID" sz="800" dirty="0">
-                <a:latin typeface="Arial" panose="020B0604020202020204" pitchFamily="34" charset="0"/>
-                <a:cs typeface="Arial" panose="020B0604020202020204" pitchFamily="34" charset="0"/>
-              </a:rPr>
-              <a:t>, cons </a:t>
-            </a:r>
-            <a:r>
-              <a:rPr lang="en-ID" sz="800" dirty="0" err="1">
-                <a:latin typeface="Arial" panose="020B0604020202020204" pitchFamily="34" charset="0"/>
-                <a:cs typeface="Arial" panose="020B0604020202020204" pitchFamily="34" charset="0"/>
-              </a:rPr>
-              <a:t>ectetuer</a:t>
-            </a:r>
-            <a:r>
-              <a:rPr lang="en-ID" sz="800" dirty="0">
-                <a:latin typeface="Arial" panose="020B0604020202020204" pitchFamily="34" charset="0"/>
-                <a:cs typeface="Arial" panose="020B0604020202020204" pitchFamily="34" charset="0"/>
-              </a:rPr>
-              <a:t> </a:t>
-            </a:r>
-            <a:r>
-              <a:rPr lang="en-ID" sz="800" dirty="0" err="1">
-                <a:latin typeface="Arial" panose="020B0604020202020204" pitchFamily="34" charset="0"/>
-                <a:cs typeface="Arial" panose="020B0604020202020204" pitchFamily="34" charset="0"/>
-              </a:rPr>
-              <a:t>adipiscing</a:t>
-            </a:r>
-            <a:r>
-              <a:rPr lang="en-ID" sz="800" dirty="0">
-                <a:latin typeface="Arial" panose="020B0604020202020204" pitchFamily="34" charset="0"/>
-                <a:cs typeface="Arial" panose="020B0604020202020204" pitchFamily="34" charset="0"/>
-              </a:rPr>
-              <a:t> </a:t>
-            </a:r>
-            <a:r>
-              <a:rPr lang="en-ID" sz="800" dirty="0" err="1">
-                <a:latin typeface="Arial" panose="020B0604020202020204" pitchFamily="34" charset="0"/>
-                <a:cs typeface="Arial" panose="020B0604020202020204" pitchFamily="34" charset="0"/>
-              </a:rPr>
-              <a:t>elit</a:t>
-            </a:r>
-            <a:r>
-              <a:rPr lang="en-ID" sz="800" dirty="0">
-                <a:latin typeface="Arial" panose="020B0604020202020204" pitchFamily="34" charset="0"/>
-                <a:cs typeface="Arial" panose="020B0604020202020204" pitchFamily="34" charset="0"/>
-              </a:rPr>
-              <a:t>, </a:t>
-            </a:r>
-            <a:r>
-              <a:rPr lang="en-ID" sz="800" dirty="0" err="1">
-                <a:latin typeface="Arial" panose="020B0604020202020204" pitchFamily="34" charset="0"/>
-                <a:cs typeface="Arial" panose="020B0604020202020204" pitchFamily="34" charset="0"/>
-              </a:rPr>
-              <a:t>sed</a:t>
-            </a:r>
-            <a:r>
-              <a:rPr lang="en-ID" sz="800" dirty="0">
-                <a:latin typeface="Arial" panose="020B0604020202020204" pitchFamily="34" charset="0"/>
-                <a:cs typeface="Arial" panose="020B0604020202020204" pitchFamily="34" charset="0"/>
-              </a:rPr>
-              <a:t> </a:t>
-            </a:r>
-            <a:r>
-              <a:rPr lang="en-ID" sz="800" dirty="0" err="1">
-                <a:latin typeface="Arial" panose="020B0604020202020204" pitchFamily="34" charset="0"/>
-                <a:cs typeface="Arial" panose="020B0604020202020204" pitchFamily="34" charset="0"/>
-              </a:rPr>
-              <a:t>diam</a:t>
-            </a:r>
-            <a:r>
-              <a:rPr lang="en-ID" sz="800" dirty="0">
-                <a:latin typeface="Arial" panose="020B0604020202020204" pitchFamily="34" charset="0"/>
-                <a:cs typeface="Arial" panose="020B0604020202020204" pitchFamily="34" charset="0"/>
-              </a:rPr>
-              <a:t> </a:t>
-            </a:r>
-            <a:r>
-              <a:rPr lang="en-ID" sz="800" dirty="0" err="1">
-                <a:latin typeface="Arial" panose="020B0604020202020204" pitchFamily="34" charset="0"/>
-                <a:cs typeface="Arial" panose="020B0604020202020204" pitchFamily="34" charset="0"/>
-              </a:rPr>
-              <a:t>nonummy</a:t>
-            </a:r>
-            <a:r>
-              <a:rPr lang="en-ID" sz="800" dirty="0">
-                <a:latin typeface="Arial" panose="020B0604020202020204" pitchFamily="34" charset="0"/>
-                <a:cs typeface="Arial" panose="020B0604020202020204" pitchFamily="34" charset="0"/>
-              </a:rPr>
-              <a:t> </a:t>
-            </a:r>
-            <a:r>
-              <a:rPr lang="en-ID" sz="800" dirty="0" err="1">
-                <a:latin typeface="Arial" panose="020B0604020202020204" pitchFamily="34" charset="0"/>
-                <a:cs typeface="Arial" panose="020B0604020202020204" pitchFamily="34" charset="0"/>
-              </a:rPr>
-              <a:t>nibh</a:t>
-            </a:r>
-            <a:r>
-              <a:rPr lang="en-ID" sz="800" dirty="0">
-                <a:latin typeface="Arial" panose="020B0604020202020204" pitchFamily="34" charset="0"/>
-                <a:cs typeface="Arial" panose="020B0604020202020204" pitchFamily="34" charset="0"/>
-              </a:rPr>
-              <a:t> </a:t>
-            </a:r>
-            <a:r>
-              <a:rPr lang="en-ID" sz="800" dirty="0" err="1">
-                <a:latin typeface="Arial" panose="020B0604020202020204" pitchFamily="34" charset="0"/>
-                <a:cs typeface="Arial" panose="020B0604020202020204" pitchFamily="34" charset="0"/>
-              </a:rPr>
-              <a:t>euismod</a:t>
-            </a:r>
-            <a:r>
-              <a:rPr lang="en-ID" sz="800" dirty="0">
-                <a:latin typeface="Arial" panose="020B0604020202020204" pitchFamily="34" charset="0"/>
-                <a:cs typeface="Arial" panose="020B0604020202020204" pitchFamily="34" charset="0"/>
-              </a:rPr>
-              <a:t> </a:t>
-            </a:r>
-            <a:r>
-              <a:rPr lang="en-ID" sz="800" dirty="0" err="1">
-                <a:latin typeface="Arial" panose="020B0604020202020204" pitchFamily="34" charset="0"/>
-                <a:cs typeface="Arial" panose="020B0604020202020204" pitchFamily="34" charset="0"/>
-              </a:rPr>
-              <a:t>tincidunt</a:t>
-            </a:r>
-            <a:r>
-              <a:rPr lang="en-ID" sz="800" dirty="0">
-                <a:latin typeface="Arial" panose="020B0604020202020204" pitchFamily="34" charset="0"/>
-                <a:cs typeface="Arial" panose="020B0604020202020204" pitchFamily="34" charset="0"/>
-              </a:rPr>
-              <a:t> </a:t>
-            </a:r>
-            <a:r>
-              <a:rPr lang="en-ID" sz="800" dirty="0" err="1">
-                <a:latin typeface="Arial" panose="020B0604020202020204" pitchFamily="34" charset="0"/>
-                <a:cs typeface="Arial" panose="020B0604020202020204" pitchFamily="34" charset="0"/>
-              </a:rPr>
-              <a:t>ut</a:t>
-            </a:r>
-            <a:r>
-              <a:rPr lang="en-ID" sz="800" dirty="0">
-                <a:latin typeface="Arial" panose="020B0604020202020204" pitchFamily="34" charset="0"/>
-                <a:cs typeface="Arial" panose="020B0604020202020204" pitchFamily="34" charset="0"/>
-              </a:rPr>
-              <a:t> </a:t>
-            </a:r>
-            <a:r>
-              <a:rPr lang="en-ID" sz="800" dirty="0" err="1">
-                <a:latin typeface="Arial" panose="020B0604020202020204" pitchFamily="34" charset="0"/>
-                <a:cs typeface="Arial" panose="020B0604020202020204" pitchFamily="34" charset="0"/>
-              </a:rPr>
-              <a:t>laoreet</a:t>
-            </a:r>
-            <a:r>
-              <a:rPr lang="en-ID" sz="800" dirty="0">
-                <a:latin typeface="Arial" panose="020B0604020202020204" pitchFamily="34" charset="0"/>
-                <a:cs typeface="Arial" panose="020B0604020202020204" pitchFamily="34" charset="0"/>
-              </a:rPr>
-              <a:t> dolore magna </a:t>
-            </a:r>
-            <a:r>
-              <a:rPr lang="en-ID" sz="800" dirty="0" err="1">
-                <a:latin typeface="Arial" panose="020B0604020202020204" pitchFamily="34" charset="0"/>
-                <a:cs typeface="Arial" panose="020B0604020202020204" pitchFamily="34" charset="0"/>
-              </a:rPr>
-              <a:t>aliquam</a:t>
-            </a:r>
-            <a:r>
-              <a:rPr lang="en-ID" sz="800" dirty="0">
-                <a:latin typeface="Arial" panose="020B0604020202020204" pitchFamily="34" charset="0"/>
-                <a:cs typeface="Arial" panose="020B0604020202020204" pitchFamily="34" charset="0"/>
-              </a:rPr>
-              <a:t> </a:t>
-            </a:r>
-            <a:r>
-              <a:rPr lang="en-ID" sz="800" dirty="0" err="1">
-                <a:latin typeface="Arial" panose="020B0604020202020204" pitchFamily="34" charset="0"/>
-                <a:cs typeface="Arial" panose="020B0604020202020204" pitchFamily="34" charset="0"/>
-              </a:rPr>
-              <a:t>erat</a:t>
-            </a:r>
-            <a:r>
-              <a:rPr lang="en-ID" sz="800" dirty="0">
-                <a:latin typeface="Arial" panose="020B0604020202020204" pitchFamily="34" charset="0"/>
-                <a:cs typeface="Arial" panose="020B0604020202020204" pitchFamily="34" charset="0"/>
-              </a:rPr>
-              <a:t> </a:t>
-            </a:r>
-            <a:r>
-              <a:rPr lang="en-ID" sz="800" dirty="0" err="1">
-                <a:latin typeface="Arial" panose="020B0604020202020204" pitchFamily="34" charset="0"/>
-                <a:cs typeface="Arial" panose="020B0604020202020204" pitchFamily="34" charset="0"/>
-              </a:rPr>
-              <a:t>volutpat</a:t>
-            </a:r>
-            <a:r>
-              <a:rPr lang="en-ID" sz="800" dirty="0">
-                <a:latin typeface="Arial" panose="020B0604020202020204" pitchFamily="34" charset="0"/>
-                <a:cs typeface="Arial" panose="020B0604020202020204" pitchFamily="34" charset="0"/>
-              </a:rPr>
-              <a:t>. Ut </a:t>
-            </a:r>
-            <a:r>
-              <a:rPr lang="en-ID" sz="800" dirty="0" err="1">
-                <a:latin typeface="Arial" panose="020B0604020202020204" pitchFamily="34" charset="0"/>
-                <a:cs typeface="Arial" panose="020B0604020202020204" pitchFamily="34" charset="0"/>
-              </a:rPr>
-              <a:t>wisi</a:t>
-            </a:r>
-            <a:r>
-              <a:rPr lang="en-ID" sz="800" dirty="0">
-                <a:latin typeface="Arial" panose="020B0604020202020204" pitchFamily="34" charset="0"/>
-                <a:cs typeface="Arial" panose="020B0604020202020204" pitchFamily="34" charset="0"/>
-              </a:rPr>
-              <a:t> </a:t>
-            </a:r>
-            <a:r>
-              <a:rPr lang="en-ID" sz="800" dirty="0" err="1">
-                <a:latin typeface="Arial" panose="020B0604020202020204" pitchFamily="34" charset="0"/>
-                <a:cs typeface="Arial" panose="020B0604020202020204" pitchFamily="34" charset="0"/>
-              </a:rPr>
-              <a:t>enim</a:t>
-            </a:r>
-            <a:r>
-              <a:rPr lang="en-ID" sz="800" dirty="0">
-                <a:latin typeface="Arial" panose="020B0604020202020204" pitchFamily="34" charset="0"/>
-                <a:cs typeface="Arial" panose="020B0604020202020204" pitchFamily="34" charset="0"/>
-              </a:rPr>
-              <a:t> ad minim </a:t>
-            </a:r>
-            <a:r>
-              <a:rPr lang="en-ID" sz="800" dirty="0" err="1">
-                <a:latin typeface="Arial" panose="020B0604020202020204" pitchFamily="34" charset="0"/>
-                <a:cs typeface="Arial" panose="020B0604020202020204" pitchFamily="34" charset="0"/>
-              </a:rPr>
-              <a:t>veniam</a:t>
-            </a:r>
-            <a:r>
-              <a:rPr lang="en-ID" sz="800" dirty="0">
-                <a:latin typeface="Arial" panose="020B0604020202020204" pitchFamily="34" charset="0"/>
-                <a:cs typeface="Arial" panose="020B0604020202020204" pitchFamily="34" charset="0"/>
-              </a:rPr>
-              <a:t>, </a:t>
-            </a:r>
-            <a:r>
-              <a:rPr lang="en-ID" sz="800" dirty="0" err="1">
-                <a:latin typeface="Arial" panose="020B0604020202020204" pitchFamily="34" charset="0"/>
-                <a:cs typeface="Arial" panose="020B0604020202020204" pitchFamily="34" charset="0"/>
-              </a:rPr>
-              <a:t>quis</a:t>
-            </a:r>
-            <a:r>
-              <a:rPr lang="en-ID" sz="800" dirty="0">
-                <a:latin typeface="Arial" panose="020B0604020202020204" pitchFamily="34" charset="0"/>
-                <a:cs typeface="Arial" panose="020B0604020202020204" pitchFamily="34" charset="0"/>
-              </a:rPr>
-              <a:t> </a:t>
-            </a:r>
-            <a:r>
-              <a:rPr lang="en-ID" sz="800" dirty="0" err="1">
-                <a:latin typeface="Arial" panose="020B0604020202020204" pitchFamily="34" charset="0"/>
-                <a:cs typeface="Arial" panose="020B0604020202020204" pitchFamily="34" charset="0"/>
-              </a:rPr>
-              <a:t>nostrud</a:t>
-            </a:r>
-            <a:r>
-              <a:rPr lang="en-ID" sz="800" dirty="0">
-                <a:latin typeface="Arial" panose="020B0604020202020204" pitchFamily="34" charset="0"/>
-                <a:cs typeface="Arial" panose="020B0604020202020204" pitchFamily="34" charset="0"/>
-              </a:rPr>
-              <a:t> </a:t>
-            </a:r>
-            <a:r>
-              <a:rPr lang="en-ID" sz="800" dirty="0" err="1">
-                <a:latin typeface="Arial" panose="020B0604020202020204" pitchFamily="34" charset="0"/>
-                <a:cs typeface="Arial" panose="020B0604020202020204" pitchFamily="34" charset="0"/>
-              </a:rPr>
-              <a:t>exerci</a:t>
-            </a:r>
-            <a:r>
-              <a:rPr lang="en-ID" sz="800" dirty="0">
-                <a:latin typeface="Arial" panose="020B0604020202020204" pitchFamily="34" charset="0"/>
-                <a:cs typeface="Arial" panose="020B0604020202020204" pitchFamily="34" charset="0"/>
-              </a:rPr>
-              <a:t> </a:t>
-            </a:r>
-            <a:r>
-              <a:rPr lang="en-ID" sz="800" dirty="0" err="1">
-                <a:latin typeface="Arial" panose="020B0604020202020204" pitchFamily="34" charset="0"/>
-                <a:cs typeface="Arial" panose="020B0604020202020204" pitchFamily="34" charset="0"/>
-              </a:rPr>
-              <a:t>tation</a:t>
-            </a:r>
-            <a:r>
-              <a:rPr lang="en-ID" sz="800" dirty="0">
-                <a:latin typeface="Arial" panose="020B0604020202020204" pitchFamily="34" charset="0"/>
-                <a:cs typeface="Arial" panose="020B0604020202020204" pitchFamily="34" charset="0"/>
-              </a:rPr>
-              <a:t> </a:t>
-            </a:r>
-            <a:r>
-              <a:rPr lang="en-ID" sz="800" dirty="0" err="1">
-                <a:latin typeface="Arial" panose="020B0604020202020204" pitchFamily="34" charset="0"/>
-                <a:cs typeface="Arial" panose="020B0604020202020204" pitchFamily="34" charset="0"/>
-              </a:rPr>
-              <a:t>ullamcorper</a:t>
-            </a:r>
-            <a:r>
-              <a:rPr lang="en-ID" sz="800" dirty="0">
-                <a:latin typeface="Arial" panose="020B0604020202020204" pitchFamily="34" charset="0"/>
-                <a:cs typeface="Arial" panose="020B0604020202020204" pitchFamily="34" charset="0"/>
-              </a:rPr>
-              <a:t> </a:t>
-            </a:r>
-            <a:r>
-              <a:rPr lang="en-ID" sz="800" dirty="0" err="1">
-                <a:latin typeface="Arial" panose="020B0604020202020204" pitchFamily="34" charset="0"/>
-                <a:cs typeface="Arial" panose="020B0604020202020204" pitchFamily="34" charset="0"/>
-              </a:rPr>
-              <a:t>suscipit</a:t>
-            </a:r>
-            <a:r>
-              <a:rPr lang="en-ID" sz="800" dirty="0">
-                <a:latin typeface="Arial" panose="020B0604020202020204" pitchFamily="34" charset="0"/>
-                <a:cs typeface="Arial" panose="020B0604020202020204" pitchFamily="34" charset="0"/>
-              </a:rPr>
-              <a:t> </a:t>
-            </a:r>
-            <a:r>
-              <a:rPr lang="en-ID" sz="800" dirty="0" err="1">
-                <a:latin typeface="Arial" panose="020B0604020202020204" pitchFamily="34" charset="0"/>
-                <a:cs typeface="Arial" panose="020B0604020202020204" pitchFamily="34" charset="0"/>
-              </a:rPr>
-              <a:t>lobortis</a:t>
-            </a:r>
-            <a:r>
-              <a:rPr lang="en-ID" sz="800" dirty="0">
-                <a:latin typeface="Arial" panose="020B0604020202020204" pitchFamily="34" charset="0"/>
-                <a:cs typeface="Arial" panose="020B0604020202020204" pitchFamily="34" charset="0"/>
-              </a:rPr>
-              <a:t> </a:t>
-            </a:r>
-            <a:r>
-              <a:rPr lang="en-ID" sz="800" dirty="0" err="1">
-                <a:latin typeface="Arial" panose="020B0604020202020204" pitchFamily="34" charset="0"/>
-                <a:cs typeface="Arial" panose="020B0604020202020204" pitchFamily="34" charset="0"/>
-              </a:rPr>
-              <a:t>nisl</a:t>
-            </a:r>
-            <a:r>
-              <a:rPr lang="en-ID" sz="800" dirty="0">
-                <a:latin typeface="Arial" panose="020B0604020202020204" pitchFamily="34" charset="0"/>
-                <a:cs typeface="Arial" panose="020B0604020202020204" pitchFamily="34" charset="0"/>
-              </a:rPr>
-              <a:t> </a:t>
-            </a:r>
-            <a:r>
-              <a:rPr lang="en-ID" sz="800" dirty="0" err="1">
-                <a:latin typeface="Arial" panose="020B0604020202020204" pitchFamily="34" charset="0"/>
-                <a:cs typeface="Arial" panose="020B0604020202020204" pitchFamily="34" charset="0"/>
-              </a:rPr>
-              <a:t>ut</a:t>
-            </a:r>
-            <a:r>
-              <a:rPr lang="en-ID" sz="800" dirty="0">
-                <a:latin typeface="Arial" panose="020B0604020202020204" pitchFamily="34" charset="0"/>
-                <a:cs typeface="Arial" panose="020B0604020202020204" pitchFamily="34" charset="0"/>
-              </a:rPr>
-              <a:t> </a:t>
-            </a:r>
-            <a:r>
-              <a:rPr lang="en-ID" sz="800" dirty="0" err="1">
-                <a:latin typeface="Arial" panose="020B0604020202020204" pitchFamily="34" charset="0"/>
-                <a:cs typeface="Arial" panose="020B0604020202020204" pitchFamily="34" charset="0"/>
-              </a:rPr>
-              <a:t>aliquip</a:t>
-            </a:r>
-            <a:r>
-              <a:rPr lang="en-ID" sz="800" dirty="0">
-                <a:latin typeface="Arial" panose="020B0604020202020204" pitchFamily="34" charset="0"/>
-                <a:cs typeface="Arial" panose="020B0604020202020204" pitchFamily="34" charset="0"/>
-              </a:rPr>
-              <a:t> ex </a:t>
-            </a:r>
-            <a:r>
-              <a:rPr lang="en-ID" sz="800" dirty="0" err="1">
-                <a:latin typeface="Arial" panose="020B0604020202020204" pitchFamily="34" charset="0"/>
-                <a:cs typeface="Arial" panose="020B0604020202020204" pitchFamily="34" charset="0"/>
-              </a:rPr>
-              <a:t>ea</a:t>
-            </a:r>
-            <a:r>
-              <a:rPr lang="en-ID" sz="800" dirty="0">
-                <a:latin typeface="Arial" panose="020B0604020202020204" pitchFamily="34" charset="0"/>
-                <a:cs typeface="Arial" panose="020B0604020202020204" pitchFamily="34" charset="0"/>
-              </a:rPr>
-              <a:t> </a:t>
-            </a:r>
-            <a:r>
-              <a:rPr lang="en-ID" sz="800" dirty="0" err="1">
-                <a:latin typeface="Arial" panose="020B0604020202020204" pitchFamily="34" charset="0"/>
-                <a:cs typeface="Arial" panose="020B0604020202020204" pitchFamily="34" charset="0"/>
-              </a:rPr>
-              <a:t>commodo</a:t>
-            </a:r>
-            <a:r>
-              <a:rPr lang="en-ID" sz="800" dirty="0">
-                <a:latin typeface="Arial" panose="020B0604020202020204" pitchFamily="34" charset="0"/>
-                <a:cs typeface="Arial" panose="020B0604020202020204" pitchFamily="34" charset="0"/>
-              </a:rPr>
-              <a:t>.</a:t>
-            </a:r>
-          </a:p>
-          <a:p>
-            <a:pPr algn="just"/>
+              <a:rPr lang="en-US" sz="800" dirty="0"/>
+              <a:t>This project develops a verification method for assessing drone-integration strategies in civil airspace using an integrated flight simulation environment. The approach converts SORA elements, Air Risk Class (ARC) and Ground Risk Class (GRC) into real-time algorithms linked to X-Plane. Population-density data and controlled-airspace boundaries are processed to classify ground and air risk dynamically as the drone moves along simulated flight paths. The system is validated through case studies over Jakarta, demonstrating that SORA-based assessments can be operationalized into continuous, data-driven risk monitoring for UAV operations.</a:t>
+            </a:r>
             <a:endParaRPr lang="en-ID" sz="800" dirty="0">
               <a:latin typeface="Arial" panose="020B0604020202020204" pitchFamily="34" charset="0"/>
               <a:cs typeface="Arial" panose="020B0604020202020204" pitchFamily="34" charset="0"/>
@@ -3609,7 +3169,7 @@
         </p:nvSpPr>
         <p:spPr>
           <a:xfrm>
-            <a:off x="144780" y="3361437"/>
+            <a:off x="144780" y="3226182"/>
             <a:ext cx="2453640" cy="215444"/>
           </a:xfrm>
           <a:prstGeom prst="rect">
@@ -3726,7 +3286,7 @@
         </p:nvSpPr>
         <p:spPr>
           <a:xfrm>
-            <a:off x="164973" y="3629593"/>
+            <a:off x="141801" y="3459642"/>
             <a:ext cx="2366772" cy="276999"/>
           </a:xfrm>
           <a:prstGeom prst="rect">
@@ -3765,8 +3325,8 @@
         </p:nvSpPr>
         <p:spPr>
           <a:xfrm>
-            <a:off x="164973" y="3944097"/>
-            <a:ext cx="2382012" cy="5878532"/>
+            <a:off x="139382" y="3717315"/>
+            <a:ext cx="2382012" cy="4031873"/>
           </a:xfrm>
           <a:prstGeom prst="rect">
             <a:avLst/>
@@ -3785,24 +3345,7 @@
                 <a:latin typeface="Arial" panose="020B0604020202020204" pitchFamily="34" charset="0"/>
                 <a:cs typeface="Arial" panose="020B0604020202020204" pitchFamily="34" charset="0"/>
               </a:rPr>
-              <a:t>Since the 2010s, air traffic management has been disrupted by the rapid growth of unmanned aerial vehicle (UAV) usage, commonly referred to as drones. The sporadic emergence of drones, operated by a highly diverse range of users, has driven researchers and aviation policy-makers to develop various strategies to ensure safety and security, particularly within civil airspace. This situation has highlighted the need for analysis of interactions among drones, between drones and manned aircraft, as well as between drones and other critical infrastructure.</a:t>
-            </a:r>
-          </a:p>
-          <a:p>
-            <a:pPr algn="just"/>
-            <a:endParaRPr lang="en-ID" sz="800" dirty="0">
-              <a:latin typeface="Arial" panose="020B0604020202020204" pitchFamily="34" charset="0"/>
-              <a:cs typeface="Arial" panose="020B0604020202020204" pitchFamily="34" charset="0"/>
-            </a:endParaRPr>
-          </a:p>
-          <a:p>
-            <a:pPr algn="just"/>
-            <a:r>
-              <a:rPr lang="en-US" sz="800" dirty="0">
-                <a:latin typeface="Arial" panose="020B0604020202020204" pitchFamily="34" charset="0"/>
-                <a:cs typeface="Arial" panose="020B0604020202020204" pitchFamily="34" charset="0"/>
-              </a:rPr>
-              <a:t>The Specific Operations Risk Assessment (SORA) framework provides a structured methodology for evaluating the risks associated with unmanned aircraft operations, with particular emphasis on air risk and ground risk. In this project, SORA is adapted into a computational form that enables both risk dimensions to be evaluated continuously during flight simulation rather than only during pre-flight planning. The air risk component is implemented through a real-time classification system that integrates controlled airspace boundaries, altitude thresholds, and aircraft position to derive ARC-b, ARC-c, or ARC-d at every simulation step. The ground risk component is similarly operationalized by mapping the aircraft’s geolocation to population density data and converting it into a dynamic GRC level that reflects the density of uninvolved persons below the flight path. </a:t>
+              <a:t>The Specific Operations Risk Assessment (SORA) framework provides a structured methodology for evaluating the risks associated with unmanned aircraft operations, with particular emphasis on air risk and ground risk. In this project, SORA is adapted into a computational form that enables both risk dimensions to be evaluated continuously during flight simulation. The air risk component is implemented through a real-time classification system that integrates controlled airspace boundaries, altitude thresholds, and aircraft position to derive ARC-b, ARC-c, or ARC-d at every simulation step. The ground risk component is similarly operationalized by mapping the aircraft’s geolocation to population density data and converting it into a dynamic GRC level that reflects the density of uninvolved persons below the flight path. </a:t>
             </a:r>
           </a:p>
           <a:p>
@@ -3821,13 +3364,6 @@
               </a:rPr>
               <a:t>The case study involves the Cengkareng Heliport (Soekarno-Hatta Airport), which acts as the central hub. From here, the UAVs are deployed to various "spokes" (destinations) across the Greater Jakarta area; focusing on a specific route, Soekarno-Hatta (CGK) to Halim Perdanakusuma (HLP). This route is unique compared to the others because it is an Inter-Airport Transfer. It is not just about moving people to a hotel; it is about connecting two vital nodes of national transportation infrastructure.</a:t>
             </a:r>
-          </a:p>
-          <a:p>
-            <a:pPr algn="just"/>
-            <a:endParaRPr lang="en-ID" sz="800" dirty="0">
-              <a:latin typeface="Arial" panose="020B0604020202020204" pitchFamily="34" charset="0"/>
-              <a:cs typeface="Arial" panose="020B0604020202020204" pitchFamily="34" charset="0"/>
-            </a:endParaRPr>
           </a:p>
         </p:txBody>
       </p:sp>
@@ -3861,11 +3397,25 @@
           <a:p>
             <a:pPr algn="just"/>
             <a:r>
-              <a:rPr lang="en-US" sz="800">
-                <a:latin typeface="Arial" panose="020B0604020202020204" pitchFamily="34" charset="0"/>
-                <a:cs typeface="Arial" panose="020B0604020202020204" pitchFamily="34" charset="0"/>
-              </a:rPr>
-              <a:t>To support real-time risk assessment based on the JARUS SORA framework, an automated real-time risk classification module based on the JARUS SORA framework was developed. The module combines Ground Risk Classification (GRC) and Air Risk Classification (ARC) to continuously evaluate the operational risk of a UAV trajectory flown in X-Plane, using population density data and controlled airspace polygons. The system is implemented in Python and runs as a loop at 2 Hz, receiving telemetry from X-Plane via XPlaneConnect, computing GRC and ARC, logging the results, updating a dashboard, and generating a KML track for post-flight visualization.</a:t>
+              <a:rPr lang="en-US" sz="800" dirty="0">
+                <a:latin typeface="Arial" panose="020B0604020202020204" pitchFamily="34" charset="0"/>
+                <a:cs typeface="Arial" panose="020B0604020202020204" pitchFamily="34" charset="0"/>
+              </a:rPr>
+              <a:t>To support real-time risk assessment based on the JARUS SORA framework, an automated real-time risk classification module based on the JARUS SORA framework was developed. The module combines Ground Risk Classification (GRC) and Air Risk Classification (ARC) to continuously evaluate the operational risk of a UAV trajectory flown in X-Plane, using population density data and controlled airspace polygons. The system is implemented in Python and runs as a loop at 2 Hz, receiving telemetry from X-Plane via </a:t>
+            </a:r>
+            <a:r>
+              <a:rPr lang="en-US" sz="800" dirty="0" err="1">
+                <a:latin typeface="Arial" panose="020B0604020202020204" pitchFamily="34" charset="0"/>
+                <a:cs typeface="Arial" panose="020B0604020202020204" pitchFamily="34" charset="0"/>
+              </a:rPr>
+              <a:t>XPlaneConnect</a:t>
+            </a:r>
+            <a:r>
+              <a:rPr lang="en-US" sz="800" dirty="0">
+                <a:latin typeface="Arial" panose="020B0604020202020204" pitchFamily="34" charset="0"/>
+                <a:cs typeface="Arial" panose="020B0604020202020204" pitchFamily="34" charset="0"/>
+              </a:rPr>
+              <a:t>, computing GRC and ARC, logging the results, updating a dashboard, and generating a KML track for post-flight visualization.</a:t>
             </a:r>
             <a:endParaRPr lang="en-ID" sz="800" dirty="0">
               <a:latin typeface="Arial" panose="020B0604020202020204" pitchFamily="34" charset="0"/>
@@ -6762,8 +6312,8 @@
         </p:blipFill>
         <p:spPr>
           <a:xfrm>
-            <a:off x="2635688" y="3562977"/>
-            <a:ext cx="2268175" cy="1727493"/>
+            <a:off x="2696199" y="3562978"/>
+            <a:ext cx="2140392" cy="1630170"/>
           </a:xfrm>
           <a:prstGeom prst="rect">
             <a:avLst/>
@@ -6784,7 +6334,7 @@
         </p:nvSpPr>
         <p:spPr>
           <a:xfrm>
-            <a:off x="4986464" y="5453922"/>
+            <a:off x="4988975" y="5323594"/>
             <a:ext cx="2453640" cy="215444"/>
           </a:xfrm>
           <a:prstGeom prst="rect">
@@ -6838,8 +6388,8 @@
         </p:blipFill>
         <p:spPr bwMode="auto">
           <a:xfrm>
-            <a:off x="2635688" y="8491069"/>
-            <a:ext cx="2268175" cy="859519"/>
+            <a:off x="2651760" y="8491069"/>
+            <a:ext cx="2252103" cy="853429"/>
           </a:xfrm>
           <a:prstGeom prst="rect">
             <a:avLst/>
@@ -6858,10 +6408,10 @@
       </p:pic>
       <p:pic>
         <p:nvPicPr>
-          <p:cNvPr id="28" name="Picture 27">
+          <p:cNvPr id="10" name="Picture 9">
             <a:extLst>
               <a:ext uri="{FF2B5EF4-FFF2-40B4-BE49-F238E27FC236}">
-                <a16:creationId xmlns:a16="http://schemas.microsoft.com/office/drawing/2014/main" id="{5C833766-3EB8-87CB-827A-D79D105CED26}"/>
+                <a16:creationId xmlns:a16="http://schemas.microsoft.com/office/drawing/2014/main" id="{5A43812C-57BE-7643-6744-D94A4D5580D5}"/>
               </a:ext>
             </a:extLst>
           </p:cNvPr>
@@ -6879,8 +6429,115 @@
         </p:blipFill>
         <p:spPr>
           <a:xfrm>
-            <a:off x="5069136" y="3232957"/>
-            <a:ext cx="2298090" cy="1519849"/>
+            <a:off x="206324" y="7725712"/>
+            <a:ext cx="2252102" cy="1489434"/>
+          </a:xfrm>
+          <a:prstGeom prst="rect">
+            <a:avLst/>
+          </a:prstGeom>
+        </p:spPr>
+      </p:pic>
+      <p:sp>
+        <p:nvSpPr>
+          <p:cNvPr id="13" name="TextBox 12">
+            <a:extLst>
+              <a:ext uri="{FF2B5EF4-FFF2-40B4-BE49-F238E27FC236}">
+                <a16:creationId xmlns:a16="http://schemas.microsoft.com/office/drawing/2014/main" id="{934E7989-8178-EFF4-C4F5-2F87F363A244}"/>
+              </a:ext>
+            </a:extLst>
+          </p:cNvPr>
+          <p:cNvSpPr txBox="1"/>
+          <p:nvPr/>
+        </p:nvSpPr>
+        <p:spPr>
+          <a:xfrm>
+            <a:off x="105555" y="9236776"/>
+            <a:ext cx="2453640" cy="338554"/>
+          </a:xfrm>
+          <a:prstGeom prst="rect">
+            <a:avLst/>
+          </a:prstGeom>
+          <a:noFill/>
+        </p:spPr>
+        <p:txBody>
+          <a:bodyPr wrap="square" rtlCol="0">
+            <a:spAutoFit/>
+          </a:bodyPr>
+          <a:lstStyle/>
+          <a:p>
+            <a:pPr algn="ctr"/>
+            <a:r>
+              <a:rPr lang="en-ID" sz="800" i="1" dirty="0">
+                <a:latin typeface="Arial" panose="020B0604020202020204" pitchFamily="34" charset="0"/>
+                <a:cs typeface="Arial" panose="020B0604020202020204" pitchFamily="34" charset="0"/>
+              </a:rPr>
+              <a:t>Picture 1. </a:t>
+            </a:r>
+            <a:r>
+              <a:rPr lang="en-US" sz="800" i="1" dirty="0"/>
+              <a:t>Three simulated flight paths (North–Blue, Central–Orange, South–Green) from CGK to HLP</a:t>
+            </a:r>
+            <a:endParaRPr lang="en-ID" sz="800" i="1" dirty="0">
+              <a:latin typeface="Arial" panose="020B0604020202020204" pitchFamily="34" charset="0"/>
+              <a:cs typeface="Arial" panose="020B0604020202020204" pitchFamily="34" charset="0"/>
+            </a:endParaRPr>
+          </a:p>
+        </p:txBody>
+      </p:sp>
+      <p:pic>
+        <p:nvPicPr>
+          <p:cNvPr id="19" name="Picture 18">
+            <a:extLst>
+              <a:ext uri="{FF2B5EF4-FFF2-40B4-BE49-F238E27FC236}">
+                <a16:creationId xmlns:a16="http://schemas.microsoft.com/office/drawing/2014/main" id="{75B8F5D7-0737-2CF8-0484-411305B8FD55}"/>
+              </a:ext>
+            </a:extLst>
+          </p:cNvPr>
+          <p:cNvPicPr>
+            <a:picLocks noChangeAspect="1"/>
+          </p:cNvPicPr>
+          <p:nvPr/>
+        </p:nvPicPr>
+        <p:blipFill>
+          <a:blip r:embed="rId9"/>
+          <a:stretch>
+            <a:fillRect/>
+          </a:stretch>
+        </p:blipFill>
+        <p:spPr>
+          <a:xfrm>
+            <a:off x="5091234" y="3232957"/>
+            <a:ext cx="2249122" cy="991571"/>
+          </a:xfrm>
+          <a:prstGeom prst="rect">
+            <a:avLst/>
+          </a:prstGeom>
+        </p:spPr>
+      </p:pic>
+      <p:pic>
+        <p:nvPicPr>
+          <p:cNvPr id="22" name="Picture 21">
+            <a:extLst>
+              <a:ext uri="{FF2B5EF4-FFF2-40B4-BE49-F238E27FC236}">
+                <a16:creationId xmlns:a16="http://schemas.microsoft.com/office/drawing/2014/main" id="{0C4C1CAF-6F46-A2B3-DD72-1B5485FFABA2}"/>
+              </a:ext>
+            </a:extLst>
+          </p:cNvPr>
+          <p:cNvPicPr>
+            <a:picLocks noChangeAspect="1"/>
+          </p:cNvPicPr>
+          <p:nvPr/>
+        </p:nvPicPr>
+        <p:blipFill>
+          <a:blip r:embed="rId10"/>
+          <a:stretch>
+            <a:fillRect/>
+          </a:stretch>
+        </p:blipFill>
+        <p:spPr>
+          <a:xfrm>
+            <a:off x="5091234" y="4316773"/>
+            <a:ext cx="2249122" cy="959965"/>
           </a:xfrm>
           <a:prstGeom prst="rect">
             <a:avLst/>
